--- a/materials/presentations/tributacao-investimentos-internacionais-apresentacao.pptx
+++ b/materials/presentations/tributacao-investimentos-internacionais-apresentacao.pptx
@@ -1679,7 +1679,7 @@
                 <a:ea typeface="Segoe UI" pitchFamily="34" charset="-122"/>
                 <a:cs typeface="Segoe UI" pitchFamily="34" charset="-120"/>
               </a:rPr>
-              <a:t>Deck em PowerPoint estruturado a partir do HTML publicado para resumir aliquotas, risco sucessorio, TOD e quando a conversa evolui para uma PIC offshore.</a:t>
+              <a:t>Deck em PowerPoint estruturado para resumir aliquotas, risco sucessorio, TOD e quando a conversa evolui para uma PIC offshore.</a:t>
             </a:r>
             <a:endParaRPr lang="en-US" sz="1495" dirty="0"/>
           </a:p>
@@ -2233,7 +2233,7 @@
                 <a:ea typeface="Segoe UI" pitchFamily="34" charset="-122"/>
                 <a:cs typeface="Segoe UI" pitchFamily="34" charset="-120"/>
               </a:rPr>
-              <a:t>Baseado no conteudo do HTML publicado no projeto.</a:t>
+              <a:t>Alta Vista Investimentos | Material de apoio</a:t>
             </a:r>
             <a:endParaRPr lang="en-US" sz="900" dirty="0"/>
           </a:p>
@@ -2584,7 +2584,7 @@
                 <a:ea typeface="Segoe UI" pitchFamily="34" charset="-122"/>
                 <a:cs typeface="Segoe UI" pitchFamily="34" charset="-120"/>
               </a:rPr>
-              <a:t>O HTML insiste que a analise nao comeca no ticker. Veiculo, jurisdicao e estrutura sucessoria alteram o retorno liquido, o risco patrimonial e a complexidade para a familia.</a:t>
+              <a:t>A analise nao comeca no ticker. Veiculo, jurisdicao e estrutura sucessoria alteram o retorno liquido, o risco patrimonial e a complexidade para a familia.</a:t>
             </a:r>
             <a:endParaRPr lang="en-US" sz="1255" dirty="0"/>
           </a:p>
@@ -4841,7 +4841,7 @@
                 <a:ea typeface="Segoe UI" pitchFamily="34" charset="-122"/>
                 <a:cs typeface="Segoe UI" pitchFamily="34" charset="-120"/>
               </a:rPr>
-              <a:t>O HTML traduz o estate tax em termos praticos: o risco nao nasce da conta internacional em si, mas do tipo de ativo mantido dentro dela e do domicilio juridico desse ativo.</a:t>
+              <a:t>O estate tax em termos praticos mostra que o risco nao nasce da conta internacional em si, mas do tipo de ativo mantido dentro dela e do domicilio juridico desse ativo.</a:t>
             </a:r>
             <a:endParaRPr lang="en-US" sz="1255" dirty="0"/>
           </a:p>
@@ -6092,7 +6092,7 @@
                 <a:ea typeface="Segoe UI" pitchFamily="34" charset="-122"/>
                 <a:cs typeface="Segoe UI" pitchFamily="34" charset="-120"/>
               </a:rPr>
-              <a:t>O Transfer on Death aparece no HTML como providencia basica da conta internacional: simples, barata e imediata, mas insuficiente se a carteira continuar carregando ativos de raiz americana acima do limite relevante.</a:t>
+              <a:t>O Transfer on Death funciona como providencia basica da conta internacional: simples, barata e imediata, mas insuficiente se a carteira continuar carregando ativos de raiz americana acima do limite relevante.</a:t>
             </a:r>
             <a:endParaRPr lang="en-US" sz="1255" dirty="0"/>
           </a:p>
@@ -7343,7 +7343,7 @@
                 <a:ea typeface="Segoe UI" pitchFamily="34" charset="-122"/>
                 <a:cs typeface="Segoe UI" pitchFamily="34" charset="-120"/>
               </a:rPr>
-              <a:t>A apresentacao derivada do HTML preserva a mesma mensagem: a PIC nao e a resposta padrao; ela aparece quando patrimonio, necessidade de governanca e sucessao mais sofisticada justificam a camada societaria adicional.</a:t>
+              <a:t>A PIC nao e a resposta padrao; ela aparece quando patrimonio, necessidade de governanca e sucessao mais sofisticada justificam a camada societaria adicional.</a:t>
             </a:r>
             <a:endParaRPr lang="en-US" sz="1255" dirty="0"/>
           </a:p>
@@ -8920,7 +8920,7 @@
                 <a:ea typeface="Segoe UI" pitchFamily="34" charset="-122"/>
                 <a:cs typeface="Segoe UI" pitchFamily="34" charset="-120"/>
               </a:rPr>
-              <a:t>O fechamento do HTML consolida uma logica simples: comecar por instrumentos eficientes, preencher TOD, mapear a raiz americana e so depois discutir estruturas mais pesadas, se o patrimonio realmente pedir.</a:t>
+              <a:t>A logica final e simples: comecar por instrumentos eficientes, preencher TOD, mapear a raiz americana e so depois discutir estruturas mais pesadas, se o patrimonio realmente pedir.</a:t>
             </a:r>
             <a:endParaRPr lang="en-US" sz="1255" dirty="0"/>
           </a:p>
